--- a/docs/Bao_Cao_Nghien_Cuu_VRPTW_Poster.pptx
+++ b/docs/Bao_Cao_Nghien_Cuu_VRPTW_Poster.pptx
@@ -4635,7 +4635,7 @@
               </a:defRPr>
             </a:pPr>
             <a:r>
-              <a:t>Khoa Điện – Điện tử</a:t>
+              <a:t>Khoa Công nghệ thông tin</a:t>
             </a:r>
           </a:p>
         </p:txBody>
@@ -4706,11 +4706,11 @@
               </a:defRPr>
             </a:pPr>
             <a:r>
-              <a:t>SVTH: Nguyễn Văn A¹ (MSSV: 10020130)</a:t>
+              <a:t>SVTH: Huỳnh Nhật Huy¹ (MSSV: 523c0012)</a:t>
             </a:r>
             <a:br/>
             <a:r>
-              <a:t>GVHD: PGS. TS. Trần Hoàng Nam*</a:t>
+              <a:t>GVHD: TS. Hồ Thị Linh*</a:t>
             </a:r>
           </a:p>
           <a:p>
@@ -4723,11 +4723,11 @@
               </a:defRPr>
             </a:pPr>
             <a:r>
-              <a:t>¹ Sinh viên ngành Kỹ thuật Điện tử - Viễn thông, Khoa Điện – Điện tử</a:t>
+              <a:t>¹ Sinh viên ngành Khoa học máy tính, Khoa Công nghệ thông tin</a:t>
             </a:r>
             <a:br/>
             <a:r>
-              <a:t>* Bộ môn Điện tử Công nghiệp, Khoa Điện – Điện tử</a:t>
+              <a:t>* Bộ môn Khoa học máy tính, Khoa Công nghệ thông tin</a:t>
             </a:r>
           </a:p>
         </p:txBody>
@@ -4779,7 +4779,7 @@
               </a:defRPr>
             </a:pPr>
             <a:r>
-              <a:t>KHOA ĐIỆN - ĐIỆN TỬ</a:t>
+              <a:t>KHOA CÔNG NGHỆ THÔNG TIN</a:t>
             </a:r>
           </a:p>
         </p:txBody>
@@ -5290,7 +5290,7 @@
                 </a:solidFill>
                 <a:latin typeface="Segoe UI"/>
               </a:rPr>
-              <a:t>CPU Intel Core i7-14700KF (28 nhân, tốc độ lên tới 5.6 GHz), 32 GB RAM DDR5.</a:t>
+              <a:t>CPU Apple M1 (Apple Silicon, 8 nhân), 16 GB bộ nhớ thống nhất (unified memory).</a:t>
             </a:r>
           </a:p>
           <a:p>
@@ -7814,7 +7814,7 @@
                 </a:solidFill>
                 <a:latin typeface="Segoe UI"/>
               </a:rPr>
-              <a:t>Đạt Gap% chỉ 0.16% trên Solomon, duy trì quy mô đội xe tối thiểu tối ưu kinh tế vượt trội so với Google OR-Tools. Đóng gói hệ thống trực quan hóa điều phối NAMI.</a:t>
+              <a:t>Đạt Gap% chỉ 0.27% trên Solomon (ở cấu hình 1200 vòng lặp), duy trì quy mô đội xe tối thiểu tối ưu kinh tế vượt trội so với Google OR-Tools. Đóng gói hệ thống trực quan hóa điều phối NAMI.</a:t>
             </a:r>
           </a:p>
           <a:p>
@@ -7877,15 +7877,15 @@
               </a:defRPr>
             </a:pPr>
             <a:r>
-              <a:t>1. Ropke &amp; Pisinger (2006). An adaptive large neighborhood search heuristic... Transportation Science, 40(4).</a:t>
+              <a:t>1. Bi et al. (2022). A reinforcement learning-aided adaptive ALNS heuristic... IEEE Trans. Cybern., 52(9).</a:t>
             </a:r>
             <a:br/>
             <a:r>
-              <a:t>2. Solomon (1987). Algorithms for the vehicle routing and scheduling problems... Operations Research, 35(2).</a:t>
+              <a:t>2. Kool et al. (2021). Deep policy dynamic programming for vehicle routing. NeurIPS.</a:t>
             </a:r>
             <a:br/>
             <a:r>
-              <a:t>3. Kool, van Hoof &amp; Welling (2018). Attention, learn to solve routing problems! ICLR.</a:t>
+              <a:t>3. Ropke &amp; Pisinger (2006). An adaptive large neighborhood search heuristic... Transportation Science, 40(4).</a:t>
             </a:r>
           </a:p>
         </p:txBody>
